--- a/00-introduction/introduction-slides.pptx
+++ b/00-introduction/introduction-slides.pptx
@@ -5,7 +5,7 @@
     <p:sldMasterId id="2147483728" r:id="rId1"/>
   </p:sldMasterIdLst>
   <p:notesMasterIdLst>
-    <p:notesMasterId r:id="rId16"/>
+    <p:notesMasterId r:id="rId17"/>
   </p:notesMasterIdLst>
   <p:sldIdLst>
     <p:sldId id="256" r:id="rId2"/>
@@ -21,17 +21,18 @@
     <p:sldId id="290" r:id="rId12"/>
     <p:sldId id="291" r:id="rId13"/>
     <p:sldId id="292" r:id="rId14"/>
-    <p:sldId id="293" r:id="rId15"/>
+    <p:sldId id="294" r:id="rId15"/>
+    <p:sldId id="293" r:id="rId16"/>
   </p:sldIdLst>
   <p:sldSz cx="18288000" cy="10287000"/>
   <p:notesSz cx="6858000" cy="9144000"/>
   <p:embeddedFontLst>
     <p:embeddedFont>
       <p:font typeface="Corbel" panose="020B0503020204020204" pitchFamily="34" charset="0"/>
-      <p:regular r:id="rId17"/>
-      <p:bold r:id="rId18"/>
-      <p:italic r:id="rId19"/>
-      <p:boldItalic r:id="rId20"/>
+      <p:regular r:id="rId18"/>
+      <p:bold r:id="rId19"/>
+      <p:italic r:id="rId20"/>
+      <p:boldItalic r:id="rId21"/>
     </p:embeddedFont>
   </p:embeddedFontLst>
   <p:defaultTextStyle>
@@ -145,7 +146,7 @@
       </p15:sldGuideLst>
     </p:ext>
     <p:ext uri="GoogleSlidesCustomDataVersion2">
-      <go:slidesCustomData xmlns:go="http://customooxmlschemas.google.com/" xmlns:ahyp="http://schemas.microsoft.com/office/drawing/2018/hyperlinkcolor" xmlns:p15="http://schemas.microsoft.com/office/powerpoint/2012/main" xmlns:p14="http://schemas.microsoft.com/office/powerpoint/2010/main" xmlns:com="http://schemas.openxmlformats.org/drawingml/2006/compatibility" xmlns:pvml="urn:schemas-microsoft-com:office:powerpoint" xmlns:v="urn:schemas-microsoft-com:vml" xmlns:o="urn:schemas-microsoft-com:office:office" xmlns:dgm="http://schemas.openxmlformats.org/drawingml/2006/diagram" xmlns:c="http://schemas.openxmlformats.org/drawingml/2006/chart" xmlns:mv="urn:schemas-microsoft-com:mac:vml" xmlns:mc="http://schemas.openxmlformats.org/markup-compatibility/2006" xmlns="" r:id="rId31" roundtripDataSignature="AMtx7mgec6XkJrYLMqIfmNf7DzA/BRS6YA=="/>
+      <go:slidesCustomData xmlns="" xmlns:mc="http://schemas.openxmlformats.org/markup-compatibility/2006" xmlns:mv="urn:schemas-microsoft-com:mac:vml" xmlns:c="http://schemas.openxmlformats.org/drawingml/2006/chart" xmlns:dgm="http://schemas.openxmlformats.org/drawingml/2006/diagram" xmlns:o="urn:schemas-microsoft-com:office:office" xmlns:v="urn:schemas-microsoft-com:vml" xmlns:pvml="urn:schemas-microsoft-com:office:powerpoint" xmlns:com="http://schemas.openxmlformats.org/drawingml/2006/compatibility" xmlns:p14="http://schemas.microsoft.com/office/powerpoint/2010/main" xmlns:p15="http://schemas.microsoft.com/office/powerpoint/2012/main" xmlns:ahyp="http://schemas.microsoft.com/office/drawing/2018/hyperlinkcolor" xmlns:go="http://customooxmlschemas.google.com/" r:id="rId31" roundtripDataSignature="AMtx7mgec6XkJrYLMqIfmNf7DzA/BRS6YA=="/>
     </p:ext>
   </p:extLst>
 </p:presentation>
@@ -2318,6 +2319,205 @@
         <p:cNvPr id="1" name="Shape 122">
           <a:extLst>
             <a:ext uri="{FF2B5EF4-FFF2-40B4-BE49-F238E27FC236}">
+              <a16:creationId xmlns:a16="http://schemas.microsoft.com/office/drawing/2014/main" id="{E4387FA1-F6BD-AB4E-7A20-9437D0F33437}"/>
+            </a:ext>
+          </a:extLst>
+        </p:cNvPr>
+        <p:cNvGrpSpPr/>
+        <p:nvPr/>
+      </p:nvGrpSpPr>
+      <p:grpSpPr>
+        <a:xfrm>
+          <a:off x="0" y="0"/>
+          <a:ext cx="0" cy="0"/>
+          <a:chOff x="0" y="0"/>
+          <a:chExt cx="0" cy="0"/>
+        </a:xfrm>
+      </p:grpSpPr>
+      <p:sp>
+        <p:nvSpPr>
+          <p:cNvPr id="123" name="Google Shape;123;p2:notes">
+            <a:extLst>
+              <a:ext uri="{FF2B5EF4-FFF2-40B4-BE49-F238E27FC236}">
+                <a16:creationId xmlns:a16="http://schemas.microsoft.com/office/drawing/2014/main" id="{E178E604-973A-A310-DE0D-081EA1DA0D9B}"/>
+              </a:ext>
+            </a:extLst>
+          </p:cNvPr>
+          <p:cNvSpPr>
+            <a:spLocks noGrp="1" noRot="1" noChangeAspect="1"/>
+          </p:cNvSpPr>
+          <p:nvPr>
+            <p:ph type="sldImg" idx="2"/>
+          </p:nvPr>
+        </p:nvSpPr>
+        <p:spPr>
+          <a:xfrm>
+            <a:off x="685800" y="1143000"/>
+            <a:ext cx="5486400" cy="3086100"/>
+          </a:xfrm>
+          <a:custGeom>
+            <a:avLst/>
+            <a:gdLst/>
+            <a:ahLst/>
+            <a:cxnLst/>
+            <a:rect l="l" t="t" r="r" b="b"/>
+            <a:pathLst>
+              <a:path w="120000" h="120000" extrusionOk="0">
+                <a:moveTo>
+                  <a:pt x="0" y="0"/>
+                </a:moveTo>
+                <a:lnTo>
+                  <a:pt x="120000" y="0"/>
+                </a:lnTo>
+                <a:lnTo>
+                  <a:pt x="120000" y="120000"/>
+                </a:lnTo>
+                <a:lnTo>
+                  <a:pt x="0" y="120000"/>
+                </a:lnTo>
+                <a:close/>
+              </a:path>
+            </a:pathLst>
+          </a:custGeom>
+          <a:noFill/>
+          <a:ln w="12700" cap="flat" cmpd="sng">
+            <a:solidFill>
+              <a:srgbClr val="000000"/>
+            </a:solidFill>
+            <a:prstDash val="solid"/>
+            <a:round/>
+            <a:headEnd type="none" w="sm" len="sm"/>
+            <a:tailEnd type="none" w="sm" len="sm"/>
+          </a:ln>
+        </p:spPr>
+      </p:sp>
+      <p:sp>
+        <p:nvSpPr>
+          <p:cNvPr id="124" name="Google Shape;124;p2:notes">
+            <a:extLst>
+              <a:ext uri="{FF2B5EF4-FFF2-40B4-BE49-F238E27FC236}">
+                <a16:creationId xmlns:a16="http://schemas.microsoft.com/office/drawing/2014/main" id="{A3F5EE8D-F6DF-E727-0F3B-60E311360713}"/>
+              </a:ext>
+            </a:extLst>
+          </p:cNvPr>
+          <p:cNvSpPr txBox="1">
+            <a:spLocks noGrp="1"/>
+          </p:cNvSpPr>
+          <p:nvPr>
+            <p:ph type="body" idx="1"/>
+          </p:nvPr>
+        </p:nvSpPr>
+        <p:spPr>
+          <a:xfrm>
+            <a:off x="685800" y="4400550"/>
+            <a:ext cx="5486400" cy="3600450"/>
+          </a:xfrm>
+          <a:prstGeom prst="rect">
+            <a:avLst/>
+          </a:prstGeom>
+          <a:noFill/>
+          <a:ln>
+            <a:noFill/>
+          </a:ln>
+        </p:spPr>
+        <p:txBody>
+          <a:bodyPr spcFirstLastPara="1" wrap="square" lIns="91425" tIns="45700" rIns="91425" bIns="45700" anchor="t" anchorCtr="0">
+            <a:noAutofit/>
+          </a:bodyPr>
+          <a:lstStyle/>
+          <a:p>
+            <a:pPr marL="0" lvl="0" indent="0" algn="r" rtl="1">
+              <a:spcBef>
+                <a:spcPts val="0"/>
+              </a:spcBef>
+              <a:spcAft>
+                <a:spcPts val="0"/>
+              </a:spcAft>
+              <a:buNone/>
+            </a:pPr>
+            <a:endParaRPr/>
+          </a:p>
+        </p:txBody>
+      </p:sp>
+      <p:sp>
+        <p:nvSpPr>
+          <p:cNvPr id="125" name="Google Shape;125;p2:notes">
+            <a:extLst>
+              <a:ext uri="{FF2B5EF4-FFF2-40B4-BE49-F238E27FC236}">
+                <a16:creationId xmlns:a16="http://schemas.microsoft.com/office/drawing/2014/main" id="{384E8E88-AC83-20EE-E63D-8F21588B53E6}"/>
+              </a:ext>
+            </a:extLst>
+          </p:cNvPr>
+          <p:cNvSpPr txBox="1">
+            <a:spLocks noGrp="1"/>
+          </p:cNvSpPr>
+          <p:nvPr>
+            <p:ph type="sldNum" idx="12"/>
+          </p:nvPr>
+        </p:nvSpPr>
+        <p:spPr>
+          <a:xfrm>
+            <a:off x="1588" y="8685213"/>
+            <a:ext cx="2971800" cy="458787"/>
+          </a:xfrm>
+          <a:prstGeom prst="rect">
+            <a:avLst/>
+          </a:prstGeom>
+          <a:noFill/>
+          <a:ln>
+            <a:noFill/>
+          </a:ln>
+        </p:spPr>
+        <p:txBody>
+          <a:bodyPr spcFirstLastPara="1" wrap="square" lIns="91425" tIns="45700" rIns="91425" bIns="45700" anchor="b" anchorCtr="0">
+            <a:noAutofit/>
+          </a:bodyPr>
+          <a:lstStyle/>
+          <a:p>
+            <a:pPr marL="0" lvl="0" indent="0" algn="r" rtl="1">
+              <a:spcBef>
+                <a:spcPts val="0"/>
+              </a:spcBef>
+              <a:spcAft>
+                <a:spcPts val="0"/>
+              </a:spcAft>
+              <a:buNone/>
+            </a:pPr>
+            <a:fld id="{00000000-1234-1234-1234-123412341234}" type="slidenum">
+              <a:rPr lang="iw-IL">
+                <a:latin typeface="Calibri" panose="020F0502020204030204" pitchFamily="34" charset="0"/>
+                <a:cs typeface="Calibri" panose="020F0502020204030204" pitchFamily="34" charset="0"/>
+              </a:rPr>
+              <a:t>14</a:t>
+            </a:fld>
+            <a:endParaRPr dirty="0">
+              <a:latin typeface="Calibri" panose="020F0502020204030204" pitchFamily="34" charset="0"/>
+              <a:cs typeface="Calibri" panose="020F0502020204030204" pitchFamily="34" charset="0"/>
+            </a:endParaRPr>
+          </a:p>
+        </p:txBody>
+      </p:sp>
+    </p:spTree>
+    <p:extLst>
+      <p:ext uri="{BB962C8B-B14F-4D97-AF65-F5344CB8AC3E}">
+        <p14:creationId xmlns:p14="http://schemas.microsoft.com/office/powerpoint/2010/main" val="1352244494"/>
+      </p:ext>
+    </p:extLst>
+  </p:cSld>
+  <p:clrMapOvr>
+    <a:masterClrMapping/>
+  </p:clrMapOvr>
+</p:notes>
+</file>
+
+<file path=ppt/notesSlides/notesSlide15.xml><?xml version="1.0" encoding="utf-8"?>
+<p:notes xmlns:a="http://schemas.openxmlformats.org/drawingml/2006/main" xmlns:r="http://schemas.openxmlformats.org/officeDocument/2006/relationships" xmlns:p="http://schemas.openxmlformats.org/presentationml/2006/main" showMasterSp="0" showMasterPhAnim="0">
+  <p:cSld>
+    <p:spTree>
+      <p:nvGrpSpPr>
+        <p:cNvPr id="1" name="Shape 122">
+          <a:extLst>
+            <a:ext uri="{FF2B5EF4-FFF2-40B4-BE49-F238E27FC236}">
               <a16:creationId xmlns:a16="http://schemas.microsoft.com/office/drawing/2014/main" id="{3DE80F06-3E47-79F8-2F5C-2EFC04407B50}"/>
             </a:ext>
           </a:extLst>
@@ -2487,7 +2687,7 @@
                 <a:latin typeface="Calibri" panose="020F0502020204030204" pitchFamily="34" charset="0"/>
                 <a:cs typeface="Calibri" panose="020F0502020204030204" pitchFamily="34" charset="0"/>
               </a:rPr>
-              <a:t>14</a:t>
+              <a:t>15</a:t>
             </a:fld>
             <a:endParaRPr dirty="0">
               <a:latin typeface="Calibri" panose="020F0502020204030204" pitchFamily="34" charset="0"/>
@@ -9285,6 +9485,13 @@
               <a:noFill/>
             </a:ln>
           </p:spPr>
+          <p:txBody>
+            <a:bodyPr/>
+            <a:lstStyle/>
+            <a:p>
+              <a:endParaRPr lang="he-IL"/>
+            </a:p>
+          </p:txBody>
         </p:sp>
         <p:sp>
           <p:nvSpPr>
@@ -9334,6 +9541,13 @@
               <a:noFill/>
             </a:ln>
           </p:spPr>
+          <p:txBody>
+            <a:bodyPr/>
+            <a:lstStyle/>
+            <a:p>
+              <a:endParaRPr lang="he-IL"/>
+            </a:p>
+          </p:txBody>
         </p:sp>
         <p:sp>
           <p:nvSpPr>
@@ -9380,6 +9594,13 @@
               <a:noFill/>
             </a:ln>
           </p:spPr>
+          <p:txBody>
+            <a:bodyPr/>
+            <a:lstStyle/>
+            <a:p>
+              <a:endParaRPr lang="he-IL"/>
+            </a:p>
+          </p:txBody>
         </p:sp>
         <p:sp>
           <p:nvSpPr>
@@ -9425,6 +9646,13 @@
               <a:noFill/>
             </a:ln>
           </p:spPr>
+          <p:txBody>
+            <a:bodyPr/>
+            <a:lstStyle/>
+            <a:p>
+              <a:endParaRPr lang="he-IL"/>
+            </a:p>
+          </p:txBody>
         </p:sp>
         <p:sp>
           <p:nvSpPr>
@@ -9476,6 +9704,13 @@
               <a:noFill/>
             </a:ln>
           </p:spPr>
+          <p:txBody>
+            <a:bodyPr/>
+            <a:lstStyle/>
+            <a:p>
+              <a:endParaRPr lang="he-IL"/>
+            </a:p>
+          </p:txBody>
         </p:sp>
         <p:sp>
           <p:nvSpPr>
@@ -9540,6 +9775,13 @@
               <a:noFill/>
             </a:ln>
           </p:spPr>
+          <p:txBody>
+            <a:bodyPr/>
+            <a:lstStyle/>
+            <a:p>
+              <a:endParaRPr lang="he-IL"/>
+            </a:p>
+          </p:txBody>
         </p:sp>
       </p:grpSp>
       <p:sp>
@@ -10468,7 +10710,7 @@
         <p:fade/>
       </p:transition>
     </mc:Choice>
-    <mc:Fallback xmlns:ahyp="http://schemas.microsoft.com/office/drawing/2018/hyperlinkcolor" xmlns:p15="http://schemas.microsoft.com/office/powerpoint/2012/main" xmlns:com="http://schemas.openxmlformats.org/drawingml/2006/compatibility" xmlns:pvml="urn:schemas-microsoft-com:office:powerpoint" xmlns:v="urn:schemas-microsoft-com:vml" xmlns:o="urn:schemas-microsoft-com:office:office" xmlns:dgm="http://schemas.openxmlformats.org/drawingml/2006/diagram" xmlns:c="http://schemas.openxmlformats.org/drawingml/2006/chart" xmlns:mv="urn:schemas-microsoft-com:mac:vml" xmlns="">
+    <mc:Fallback xmlns="" xmlns:mv="urn:schemas-microsoft-com:mac:vml" xmlns:c="http://schemas.openxmlformats.org/drawingml/2006/chart" xmlns:dgm="http://schemas.openxmlformats.org/drawingml/2006/diagram" xmlns:o="urn:schemas-microsoft-com:office:office" xmlns:v="urn:schemas-microsoft-com:vml" xmlns:pvml="urn:schemas-microsoft-com:office:powerpoint" xmlns:com="http://schemas.openxmlformats.org/drawingml/2006/compatibility" xmlns:p15="http://schemas.microsoft.com/office/powerpoint/2012/main" xmlns:ahyp="http://schemas.microsoft.com/office/drawing/2018/hyperlinkcolor">
       <p:transition spd="slow">
         <p:fade/>
       </p:transition>
@@ -12604,7 +12846,7 @@
                 <a:cs typeface="Calibri" panose="020F0502020204030204" pitchFamily="34" charset="0"/>
                 <a:sym typeface="Arial"/>
               </a:rPr>
-              <a:t>מותר ומומלץ </a:t>
+              <a:t>מותר </a:t>
             </a:r>
             <a:r>
               <a:rPr lang="he-IL" sz="6000">
@@ -12615,7 +12857,7 @@
                 <a:cs typeface="Calibri" panose="020F0502020204030204" pitchFamily="34" charset="0"/>
                 <a:sym typeface="Arial"/>
               </a:rPr>
-              <a:t>להשתמש בכלי ב"מ כדי לעשות עבודה טובה, אבל:</a:t>
+              <a:t>להשתמש בכלי ב"מ, אבל:</a:t>
             </a:r>
           </a:p>
           <a:p>
@@ -12657,30 +12899,7 @@
                 <a:cs typeface="Calibri" panose="020F0502020204030204" pitchFamily="34" charset="0"/>
                 <a:sym typeface="Arial"/>
               </a:rPr>
-              <a:t>לבדוק ולהבין לעומק את התשובות (</a:t>
-            </a:r>
-            <a:r>
-              <a:rPr lang="he-IL" sz="6000">
-                <a:solidFill>
-                  <a:srgbClr val="081D3F"/>
-                </a:solidFill>
-                <a:latin typeface="Calibri" panose="020F0502020204030204" pitchFamily="34" charset="0"/>
-                <a:cs typeface="Calibri" panose="020F0502020204030204" pitchFamily="34" charset="0"/>
-                <a:sym typeface="Arial"/>
-                <a:hlinkClick r:id="rId4"/>
-              </a:rPr>
-              <a:t>דוגמה</a:t>
-            </a:r>
-            <a:r>
-              <a:rPr lang="he-IL" sz="6000">
-                <a:solidFill>
-                  <a:srgbClr val="081D3F"/>
-                </a:solidFill>
-                <a:latin typeface="Calibri" panose="020F0502020204030204" pitchFamily="34" charset="0"/>
-                <a:cs typeface="Calibri" panose="020F0502020204030204" pitchFamily="34" charset="0"/>
-                <a:sym typeface="Arial"/>
-              </a:rPr>
-              <a:t>);</a:t>
+              <a:t>לבדוק ולהבין את כל התשובות – אתם אחראים!</a:t>
             </a:r>
           </a:p>
           <a:p>
@@ -12743,7 +12962,7 @@
             </a:pPr>
             <a:r>
               <a:rPr lang="he-IL" sz="6000">
-                <a:hlinkClick r:id="rId5"/>
+                <a:hlinkClick r:id="rId4"/>
               </a:rPr>
               <a:t>תקנון יושר - המחלקה למדעי המחשב</a:t>
             </a:r>
@@ -12751,38 +12970,6 @@
               <a:rPr lang="he-IL" sz="6000"/>
               <a:t> </a:t>
             </a:r>
-            <a:endParaRPr lang="en-IL" sz="6000"/>
-          </a:p>
-        </p:txBody>
-      </p:sp>
-      <p:sp>
-        <p:nvSpPr>
-          <p:cNvPr id="4" name="TextBox 3">
-            <a:extLst>
-              <a:ext uri="{FF2B5EF4-FFF2-40B4-BE49-F238E27FC236}">
-                <a16:creationId xmlns:a16="http://schemas.microsoft.com/office/drawing/2014/main" id="{209F5817-9191-4906-3BFF-1E738E1EAB5C}"/>
-              </a:ext>
-            </a:extLst>
-          </p:cNvPr>
-          <p:cNvSpPr txBox="1"/>
-          <p:nvPr/>
-        </p:nvSpPr>
-        <p:spPr>
-          <a:xfrm>
-            <a:off x="4605453" y="9271337"/>
-            <a:ext cx="11229279" cy="1015663"/>
-          </a:xfrm>
-          <a:prstGeom prst="rect">
-            <a:avLst/>
-          </a:prstGeom>
-          <a:noFill/>
-        </p:spPr>
-        <p:txBody>
-          <a:bodyPr wrap="square">
-            <a:spAutoFit/>
-          </a:bodyPr>
-          <a:lstStyle/>
-          <a:p>
             <a:endParaRPr lang="en-IL" sz="6000"/>
           </a:p>
         </p:txBody>
@@ -13095,6 +13282,743 @@
         <p:cNvPr id="1" name="Shape 126">
           <a:extLst>
             <a:ext uri="{FF2B5EF4-FFF2-40B4-BE49-F238E27FC236}">
+              <a16:creationId xmlns:a16="http://schemas.microsoft.com/office/drawing/2014/main" id="{E5D34F34-5737-E55C-E9B0-F81ABB630071}"/>
+            </a:ext>
+          </a:extLst>
+        </p:cNvPr>
+        <p:cNvGrpSpPr/>
+        <p:nvPr/>
+      </p:nvGrpSpPr>
+      <p:grpSpPr>
+        <a:xfrm>
+          <a:off x="0" y="0"/>
+          <a:ext cx="0" cy="0"/>
+          <a:chOff x="0" y="0"/>
+          <a:chExt cx="0" cy="0"/>
+        </a:xfrm>
+      </p:grpSpPr>
+      <p:sp>
+        <p:nvSpPr>
+          <p:cNvPr id="127" name="Google Shape;127;p2">
+            <a:extLst>
+              <a:ext uri="{FF2B5EF4-FFF2-40B4-BE49-F238E27FC236}">
+                <a16:creationId xmlns:a16="http://schemas.microsoft.com/office/drawing/2014/main" id="{32651519-5773-8EDD-C66F-8F67BA97482D}"/>
+              </a:ext>
+            </a:extLst>
+          </p:cNvPr>
+          <p:cNvSpPr txBox="1"/>
+          <p:nvPr/>
+        </p:nvSpPr>
+        <p:spPr>
+          <a:xfrm>
+            <a:off x="3735142" y="-24500"/>
+            <a:ext cx="10817715" cy="1615827"/>
+          </a:xfrm>
+          <a:prstGeom prst="rect">
+            <a:avLst/>
+          </a:prstGeom>
+          <a:noFill/>
+          <a:ln>
+            <a:noFill/>
+          </a:ln>
+        </p:spPr>
+        <p:txBody>
+          <a:bodyPr spcFirstLastPara="1" wrap="square" lIns="0" tIns="0" rIns="0" bIns="0" anchor="t" anchorCtr="0">
+            <a:spAutoFit/>
+          </a:bodyPr>
+          <a:lstStyle/>
+          <a:p>
+            <a:pPr marL="0" marR="0" lvl="0" indent="0" algn="ctr" rtl="1">
+              <a:lnSpc>
+                <a:spcPct val="140000"/>
+              </a:lnSpc>
+              <a:spcBef>
+                <a:spcPts val="0"/>
+              </a:spcBef>
+              <a:spcAft>
+                <a:spcPts val="0"/>
+              </a:spcAft>
+              <a:buNone/>
+            </a:pPr>
+            <a:r>
+              <a:rPr lang="he-IL" sz="7500" b="1">
+                <a:solidFill>
+                  <a:srgbClr val="081D3F"/>
+                </a:solidFill>
+                <a:latin typeface="Calibri" panose="020F0502020204030204" pitchFamily="34" charset="0"/>
+                <a:cs typeface="Calibri" panose="020F0502020204030204" pitchFamily="34" charset="0"/>
+                <a:sym typeface="Arial"/>
+              </a:rPr>
+              <a:t>שימוש בכלי בינה מלאכותית</a:t>
+            </a:r>
+            <a:endParaRPr sz="7500" b="1" i="0" u="none" strike="noStrike" cap="none" dirty="0">
+              <a:solidFill>
+                <a:srgbClr val="081D3F"/>
+              </a:solidFill>
+              <a:latin typeface="Calibri" panose="020F0502020204030204" pitchFamily="34" charset="0"/>
+              <a:cs typeface="Calibri" panose="020F0502020204030204" pitchFamily="34" charset="0"/>
+              <a:sym typeface="Arial"/>
+            </a:endParaRPr>
+          </a:p>
+        </p:txBody>
+      </p:sp>
+      <p:pic>
+        <p:nvPicPr>
+          <p:cNvPr id="166" name="Google Shape;166;p2" descr="מדיניות פרטיות - מערכת בגרויות אוניברסיטת אריאל">
+            <a:extLst>
+              <a:ext uri="{FF2B5EF4-FFF2-40B4-BE49-F238E27FC236}">
+                <a16:creationId xmlns:a16="http://schemas.microsoft.com/office/drawing/2014/main" id="{5735AA0B-D130-1B92-37F5-F3CD3DF27BDD}"/>
+              </a:ext>
+            </a:extLst>
+          </p:cNvPr>
+          <p:cNvPicPr preferRelativeResize="0"/>
+          <p:nvPr/>
+        </p:nvPicPr>
+        <p:blipFill rotWithShape="1">
+          <a:blip r:embed="rId3">
+            <a:alphaModFix/>
+          </a:blip>
+          <a:srcRect/>
+          <a:stretch/>
+        </p:blipFill>
+        <p:spPr>
+          <a:xfrm>
+            <a:off x="16306800" y="266700"/>
+            <a:ext cx="1676400" cy="928714"/>
+          </a:xfrm>
+          <a:prstGeom prst="rect">
+            <a:avLst/>
+          </a:prstGeom>
+          <a:noFill/>
+          <a:ln>
+            <a:noFill/>
+          </a:ln>
+        </p:spPr>
+      </p:pic>
+      <p:sp>
+        <p:nvSpPr>
+          <p:cNvPr id="2" name="Google Shape;127;p2">
+            <a:extLst>
+              <a:ext uri="{FF2B5EF4-FFF2-40B4-BE49-F238E27FC236}">
+                <a16:creationId xmlns:a16="http://schemas.microsoft.com/office/drawing/2014/main" id="{73A759A4-726F-905F-89A3-1F982921584C}"/>
+              </a:ext>
+            </a:extLst>
+          </p:cNvPr>
+          <p:cNvSpPr txBox="1"/>
+          <p:nvPr/>
+        </p:nvSpPr>
+        <p:spPr>
+          <a:xfrm>
+            <a:off x="1955552" y="1195414"/>
+            <a:ext cx="16042888" cy="9307163"/>
+          </a:xfrm>
+          <a:prstGeom prst="rect">
+            <a:avLst/>
+          </a:prstGeom>
+          <a:noFill/>
+          <a:ln>
+            <a:noFill/>
+          </a:ln>
+        </p:spPr>
+        <p:txBody>
+          <a:bodyPr spcFirstLastPara="1" wrap="square" lIns="0" tIns="0" rIns="0" bIns="0" anchor="t" anchorCtr="0">
+            <a:spAutoFit/>
+          </a:bodyPr>
+          <a:lstStyle/>
+          <a:p>
+            <a:pPr marL="857250" indent="-857250" algn="r" rtl="1">
+              <a:lnSpc>
+                <a:spcPct val="140000"/>
+              </a:lnSpc>
+              <a:buFont typeface="Arial" panose="020B0604020202020204" pitchFamily="34" charset="0"/>
+              <a:buChar char="•"/>
+            </a:pPr>
+            <a:r>
+              <a:rPr lang="he-IL" sz="6000">
+                <a:solidFill>
+                  <a:srgbClr val="081D3F"/>
+                </a:solidFill>
+                <a:latin typeface="Calibri" panose="020F0502020204030204" pitchFamily="34" charset="0"/>
+                <a:cs typeface="Calibri" panose="020F0502020204030204" pitchFamily="34" charset="0"/>
+                <a:sym typeface="Arial"/>
+              </a:rPr>
+              <a:t>כלי בינה מלאכותית בימינו </a:t>
+            </a:r>
+            <a:r>
+              <a:rPr lang="he-IL" sz="6000">
+                <a:solidFill>
+                  <a:srgbClr val="00B050"/>
+                </a:solidFill>
+                <a:latin typeface="Calibri" panose="020F0502020204030204" pitchFamily="34" charset="0"/>
+                <a:cs typeface="Calibri" panose="020F0502020204030204" pitchFamily="34" charset="0"/>
+                <a:sym typeface="Arial"/>
+              </a:rPr>
+              <a:t>יכולים להבין מאמרים</a:t>
+            </a:r>
+            <a:r>
+              <a:rPr lang="he-IL" sz="6000">
+                <a:solidFill>
+                  <a:srgbClr val="081D3F"/>
+                </a:solidFill>
+                <a:latin typeface="Calibri" panose="020F0502020204030204" pitchFamily="34" charset="0"/>
+                <a:cs typeface="Calibri" panose="020F0502020204030204" pitchFamily="34" charset="0"/>
+                <a:sym typeface="Arial"/>
+              </a:rPr>
+              <a:t>, אבל </a:t>
+            </a:r>
+            <a:r>
+              <a:rPr lang="he-IL" sz="6000">
+                <a:solidFill>
+                  <a:srgbClr val="FF0000"/>
+                </a:solidFill>
+                <a:latin typeface="Calibri" panose="020F0502020204030204" pitchFamily="34" charset="0"/>
+                <a:cs typeface="Calibri" panose="020F0502020204030204" pitchFamily="34" charset="0"/>
+                <a:sym typeface="Arial"/>
+              </a:rPr>
+              <a:t>יכולים גם לעשות טעויות </a:t>
+            </a:r>
+            <a:r>
+              <a:rPr lang="he-IL" sz="4800">
+                <a:solidFill>
+                  <a:srgbClr val="081D3F"/>
+                </a:solidFill>
+                <a:latin typeface="Calibri" panose="020F0502020204030204" pitchFamily="34" charset="0"/>
+                <a:cs typeface="Calibri" panose="020F0502020204030204" pitchFamily="34" charset="0"/>
+                <a:sym typeface="Arial"/>
+              </a:rPr>
+              <a:t>(</a:t>
+            </a:r>
+            <a:r>
+              <a:rPr lang="he-IL" sz="4800">
+                <a:solidFill>
+                  <a:srgbClr val="081D3F"/>
+                </a:solidFill>
+                <a:latin typeface="Calibri" panose="020F0502020204030204" pitchFamily="34" charset="0"/>
+                <a:cs typeface="Calibri" panose="020F0502020204030204" pitchFamily="34" charset="0"/>
+                <a:sym typeface="Arial"/>
+                <a:hlinkClick r:id="rId4" action="ppaction://hlinkfile"/>
+              </a:rPr>
+              <a:t>מאמר</a:t>
+            </a:r>
+            <a:r>
+              <a:rPr lang="he-IL" sz="4800">
+                <a:solidFill>
+                  <a:srgbClr val="081D3F"/>
+                </a:solidFill>
+                <a:latin typeface="Calibri" panose="020F0502020204030204" pitchFamily="34" charset="0"/>
+                <a:cs typeface="Calibri" panose="020F0502020204030204" pitchFamily="34" charset="0"/>
+                <a:sym typeface="Arial"/>
+              </a:rPr>
+              <a:t>, </a:t>
+            </a:r>
+            <a:r>
+              <a:rPr lang="he-IL" sz="4800">
+                <a:solidFill>
+                  <a:srgbClr val="081D3F"/>
+                </a:solidFill>
+                <a:latin typeface="Calibri" panose="020F0502020204030204" pitchFamily="34" charset="0"/>
+                <a:cs typeface="Calibri" panose="020F0502020204030204" pitchFamily="34" charset="0"/>
+                <a:sym typeface="Arial"/>
+                <a:hlinkClick r:id="rId5"/>
+              </a:rPr>
+              <a:t>שיחה</a:t>
+            </a:r>
+            <a:r>
+              <a:rPr lang="he-IL" sz="4800">
+                <a:solidFill>
+                  <a:srgbClr val="081D3F"/>
+                </a:solidFill>
+                <a:latin typeface="Calibri" panose="020F0502020204030204" pitchFamily="34" charset="0"/>
+                <a:cs typeface="Calibri" panose="020F0502020204030204" pitchFamily="34" charset="0"/>
+                <a:sym typeface="Arial"/>
+              </a:rPr>
+              <a:t>)</a:t>
+            </a:r>
+            <a:r>
+              <a:rPr lang="he-IL" sz="7200">
+                <a:solidFill>
+                  <a:srgbClr val="081D3F"/>
+                </a:solidFill>
+                <a:latin typeface="Calibri" panose="020F0502020204030204" pitchFamily="34" charset="0"/>
+                <a:cs typeface="Calibri" panose="020F0502020204030204" pitchFamily="34" charset="0"/>
+                <a:sym typeface="Arial"/>
+              </a:rPr>
+              <a:t>.</a:t>
+            </a:r>
+          </a:p>
+          <a:p>
+            <a:pPr marL="857250" indent="-857250" algn="r" rtl="1">
+              <a:lnSpc>
+                <a:spcPct val="140000"/>
+              </a:lnSpc>
+              <a:buFont typeface="Arial" panose="020B0604020202020204" pitchFamily="34" charset="0"/>
+              <a:buChar char="•"/>
+            </a:pPr>
+            <a:r>
+              <a:rPr lang="he-IL" sz="6000">
+                <a:solidFill>
+                  <a:srgbClr val="081D3F"/>
+                </a:solidFill>
+                <a:latin typeface="Calibri" panose="020F0502020204030204" pitchFamily="34" charset="0"/>
+                <a:cs typeface="Calibri" panose="020F0502020204030204" pitchFamily="34" charset="0"/>
+                <a:sym typeface="Arial"/>
+              </a:rPr>
+              <a:t>כמתכנתים, </a:t>
+            </a:r>
+            <a:r>
+              <a:rPr lang="he-IL" sz="6000" b="1">
+                <a:solidFill>
+                  <a:schemeClr val="accent1"/>
+                </a:solidFill>
+                <a:latin typeface="Calibri" panose="020F0502020204030204" pitchFamily="34" charset="0"/>
+                <a:cs typeface="Calibri" panose="020F0502020204030204" pitchFamily="34" charset="0"/>
+                <a:sym typeface="Arial"/>
+              </a:rPr>
+              <a:t>האחריות על הקוד היא עליכם</a:t>
+            </a:r>
+            <a:r>
+              <a:rPr lang="he-IL" sz="6000">
+                <a:solidFill>
+                  <a:srgbClr val="081D3F"/>
+                </a:solidFill>
+                <a:latin typeface="Calibri" panose="020F0502020204030204" pitchFamily="34" charset="0"/>
+                <a:cs typeface="Calibri" panose="020F0502020204030204" pitchFamily="34" charset="0"/>
+                <a:sym typeface="Arial"/>
+              </a:rPr>
+              <a:t>. </a:t>
+            </a:r>
+          </a:p>
+          <a:p>
+            <a:pPr marL="857250" indent="-857250" algn="r" rtl="1">
+              <a:lnSpc>
+                <a:spcPct val="140000"/>
+              </a:lnSpc>
+              <a:buFont typeface="Arial" panose="020B0604020202020204" pitchFamily="34" charset="0"/>
+              <a:buChar char="•"/>
+            </a:pPr>
+            <a:r>
+              <a:rPr lang="he-IL" sz="6000">
+                <a:solidFill>
+                  <a:srgbClr val="081D3F"/>
+                </a:solidFill>
+                <a:latin typeface="Calibri" panose="020F0502020204030204" pitchFamily="34" charset="0"/>
+                <a:cs typeface="Calibri" panose="020F0502020204030204" pitchFamily="34" charset="0"/>
+                <a:sym typeface="Arial"/>
+              </a:rPr>
+              <a:t>אתם צריכים לקרוא ולהבין את המאמר בעצמכם, כדי שתוכלו לוודא אם הב"מ עשה עבודה נכונה.</a:t>
+            </a:r>
+            <a:endParaRPr lang="he-IL" sz="7200">
+              <a:solidFill>
+                <a:srgbClr val="081D3F"/>
+              </a:solidFill>
+              <a:latin typeface="Calibri" panose="020F0502020204030204" pitchFamily="34" charset="0"/>
+              <a:cs typeface="Calibri" panose="020F0502020204030204" pitchFamily="34" charset="0"/>
+              <a:sym typeface="Arial"/>
+            </a:endParaRPr>
+          </a:p>
+          <a:p>
+            <a:pPr marL="857250" indent="-857250" algn="r" rtl="1">
+              <a:lnSpc>
+                <a:spcPct val="140000"/>
+              </a:lnSpc>
+              <a:buFont typeface="Arial" panose="020B0604020202020204" pitchFamily="34" charset="0"/>
+              <a:buChar char="•"/>
+            </a:pPr>
+            <a:r>
+              <a:rPr lang="he-IL" sz="6000" b="1">
+                <a:solidFill>
+                  <a:srgbClr val="0070C0"/>
+                </a:solidFill>
+                <a:latin typeface="Calibri" panose="020F0502020204030204" pitchFamily="34" charset="0"/>
+                <a:cs typeface="Calibri" panose="020F0502020204030204" pitchFamily="34" charset="0"/>
+                <a:sym typeface="Arial"/>
+              </a:rPr>
+              <a:t>חובה</a:t>
+            </a:r>
+            <a:r>
+              <a:rPr lang="he-IL" sz="6000" b="1">
+                <a:solidFill>
+                  <a:srgbClr val="081D3F"/>
+                </a:solidFill>
+                <a:latin typeface="Calibri" panose="020F0502020204030204" pitchFamily="34" charset="0"/>
+                <a:cs typeface="Calibri" panose="020F0502020204030204" pitchFamily="34" charset="0"/>
+                <a:sym typeface="Arial"/>
+              </a:rPr>
+              <a:t> </a:t>
+            </a:r>
+            <a:r>
+              <a:rPr lang="he-IL" sz="6000">
+                <a:solidFill>
+                  <a:srgbClr val="081D3F"/>
+                </a:solidFill>
+                <a:latin typeface="Calibri" panose="020F0502020204030204" pitchFamily="34" charset="0"/>
+                <a:cs typeface="Calibri" panose="020F0502020204030204" pitchFamily="34" charset="0"/>
+                <a:sym typeface="Arial"/>
+              </a:rPr>
+              <a:t>להגיש קישור-שיתוף או העתק של השיחה.</a:t>
+            </a:r>
+          </a:p>
+          <a:p>
+            <a:pPr marL="857250" indent="-857250" algn="r" rtl="1">
+              <a:lnSpc>
+                <a:spcPct val="140000"/>
+              </a:lnSpc>
+              <a:buFont typeface="Arial" panose="020B0604020202020204" pitchFamily="34" charset="0"/>
+              <a:buChar char="•"/>
+            </a:pPr>
+            <a:r>
+              <a:rPr lang="he-IL" sz="6000">
+                <a:hlinkClick r:id="rId6"/>
+              </a:rPr>
+              <a:t>תקנון יושר - המחלקה למדעי המחשב</a:t>
+            </a:r>
+            <a:r>
+              <a:rPr lang="he-IL" sz="6000"/>
+              <a:t> </a:t>
+            </a:r>
+          </a:p>
+        </p:txBody>
+      </p:sp>
+      <p:sp>
+        <p:nvSpPr>
+          <p:cNvPr id="4" name="TextBox 3">
+            <a:extLst>
+              <a:ext uri="{FF2B5EF4-FFF2-40B4-BE49-F238E27FC236}">
+                <a16:creationId xmlns:a16="http://schemas.microsoft.com/office/drawing/2014/main" id="{44BE247D-7523-0BBD-5F28-6EAF6A1EEBBA}"/>
+              </a:ext>
+            </a:extLst>
+          </p:cNvPr>
+          <p:cNvSpPr txBox="1"/>
+          <p:nvPr/>
+        </p:nvSpPr>
+        <p:spPr>
+          <a:xfrm>
+            <a:off x="5605578" y="9204662"/>
+            <a:ext cx="11229279" cy="1015663"/>
+          </a:xfrm>
+          <a:prstGeom prst="rect">
+            <a:avLst/>
+          </a:prstGeom>
+          <a:noFill/>
+        </p:spPr>
+        <p:txBody>
+          <a:bodyPr wrap="square">
+            <a:spAutoFit/>
+          </a:bodyPr>
+          <a:lstStyle/>
+          <a:p>
+            <a:endParaRPr lang="en-IL" sz="6000"/>
+          </a:p>
+        </p:txBody>
+      </p:sp>
+    </p:spTree>
+    <p:extLst>
+      <p:ext uri="{BB962C8B-B14F-4D97-AF65-F5344CB8AC3E}">
+        <p14:creationId xmlns:p14="http://schemas.microsoft.com/office/powerpoint/2010/main" val="4140620431"/>
+      </p:ext>
+    </p:extLst>
+  </p:cSld>
+  <p:clrMapOvr>
+    <a:masterClrMapping/>
+  </p:clrMapOvr>
+  <mc:AlternateContent xmlns:mc="http://schemas.openxmlformats.org/markup-compatibility/2006" xmlns:p14="http://schemas.microsoft.com/office/powerpoint/2010/main">
+    <mc:Choice Requires="p14">
+      <p:transition spd="med" p14:dur="700">
+        <p:fade/>
+      </p:transition>
+    </mc:Choice>
+    <mc:Fallback xmlns="">
+      <p:transition spd="med">
+        <p:fade/>
+      </p:transition>
+    </mc:Fallback>
+  </mc:AlternateContent>
+  <p:timing>
+    <p:tnLst>
+      <p:par>
+        <p:cTn id="1" dur="indefinite" restart="never" nodeType="tmRoot">
+          <p:childTnLst>
+            <p:seq concurrent="1" nextAc="seek">
+              <p:cTn id="2" dur="indefinite" nodeType="mainSeq">
+                <p:childTnLst>
+                  <p:par>
+                    <p:cTn id="3" fill="hold">
+                      <p:stCondLst>
+                        <p:cond delay="indefinite"/>
+                      </p:stCondLst>
+                      <p:childTnLst>
+                        <p:par>
+                          <p:cTn id="4" fill="hold">
+                            <p:stCondLst>
+                              <p:cond delay="0"/>
+                            </p:stCondLst>
+                            <p:childTnLst>
+                              <p:par>
+                                <p:cTn id="5" presetID="1" presetClass="entr" presetSubtype="0" fill="hold" nodeType="clickEffect">
+                                  <p:stCondLst>
+                                    <p:cond delay="0"/>
+                                  </p:stCondLst>
+                                  <p:childTnLst>
+                                    <p:set>
+                                      <p:cBhvr>
+                                        <p:cTn id="6" dur="1" fill="hold">
+                                          <p:stCondLst>
+                                            <p:cond delay="0"/>
+                                          </p:stCondLst>
+                                        </p:cTn>
+                                        <p:tgtEl>
+                                          <p:spTgt spid="2">
+                                            <p:txEl>
+                                              <p:pRg st="0" end="0"/>
+                                            </p:txEl>
+                                          </p:spTgt>
+                                        </p:tgtEl>
+                                        <p:attrNameLst>
+                                          <p:attrName>style.visibility</p:attrName>
+                                        </p:attrNameLst>
+                                      </p:cBhvr>
+                                      <p:to>
+                                        <p:strVal val="visible"/>
+                                      </p:to>
+                                    </p:set>
+                                  </p:childTnLst>
+                                </p:cTn>
+                              </p:par>
+                            </p:childTnLst>
+                          </p:cTn>
+                        </p:par>
+                      </p:childTnLst>
+                    </p:cTn>
+                  </p:par>
+                  <p:par>
+                    <p:cTn id="7" fill="hold">
+                      <p:stCondLst>
+                        <p:cond delay="indefinite"/>
+                      </p:stCondLst>
+                      <p:childTnLst>
+                        <p:par>
+                          <p:cTn id="8" fill="hold">
+                            <p:stCondLst>
+                              <p:cond delay="0"/>
+                            </p:stCondLst>
+                            <p:childTnLst>
+                              <p:par>
+                                <p:cTn id="9" presetID="1" presetClass="entr" presetSubtype="0" fill="hold" nodeType="clickEffect">
+                                  <p:stCondLst>
+                                    <p:cond delay="0"/>
+                                  </p:stCondLst>
+                                  <p:childTnLst>
+                                    <p:set>
+                                      <p:cBhvr>
+                                        <p:cTn id="10" dur="1" fill="hold">
+                                          <p:stCondLst>
+                                            <p:cond delay="0"/>
+                                          </p:stCondLst>
+                                        </p:cTn>
+                                        <p:tgtEl>
+                                          <p:spTgt spid="2">
+                                            <p:txEl>
+                                              <p:pRg st="1" end="1"/>
+                                            </p:txEl>
+                                          </p:spTgt>
+                                        </p:tgtEl>
+                                        <p:attrNameLst>
+                                          <p:attrName>style.visibility</p:attrName>
+                                        </p:attrNameLst>
+                                      </p:cBhvr>
+                                      <p:to>
+                                        <p:strVal val="visible"/>
+                                      </p:to>
+                                    </p:set>
+                                  </p:childTnLst>
+                                </p:cTn>
+                              </p:par>
+                            </p:childTnLst>
+                          </p:cTn>
+                        </p:par>
+                      </p:childTnLst>
+                    </p:cTn>
+                  </p:par>
+                  <p:par>
+                    <p:cTn id="11" fill="hold">
+                      <p:stCondLst>
+                        <p:cond delay="indefinite"/>
+                      </p:stCondLst>
+                      <p:childTnLst>
+                        <p:par>
+                          <p:cTn id="12" fill="hold">
+                            <p:stCondLst>
+                              <p:cond delay="0"/>
+                            </p:stCondLst>
+                            <p:childTnLst>
+                              <p:par>
+                                <p:cTn id="13" presetID="1" presetClass="entr" presetSubtype="0" fill="hold" nodeType="clickEffect">
+                                  <p:stCondLst>
+                                    <p:cond delay="0"/>
+                                  </p:stCondLst>
+                                  <p:childTnLst>
+                                    <p:set>
+                                      <p:cBhvr>
+                                        <p:cTn id="14" dur="1" fill="hold">
+                                          <p:stCondLst>
+                                            <p:cond delay="0"/>
+                                          </p:stCondLst>
+                                        </p:cTn>
+                                        <p:tgtEl>
+                                          <p:spTgt spid="2">
+                                            <p:txEl>
+                                              <p:pRg st="2" end="2"/>
+                                            </p:txEl>
+                                          </p:spTgt>
+                                        </p:tgtEl>
+                                        <p:attrNameLst>
+                                          <p:attrName>style.visibility</p:attrName>
+                                        </p:attrNameLst>
+                                      </p:cBhvr>
+                                      <p:to>
+                                        <p:strVal val="visible"/>
+                                      </p:to>
+                                    </p:set>
+                                  </p:childTnLst>
+                                </p:cTn>
+                              </p:par>
+                            </p:childTnLst>
+                          </p:cTn>
+                        </p:par>
+                      </p:childTnLst>
+                    </p:cTn>
+                  </p:par>
+                  <p:par>
+                    <p:cTn id="15" fill="hold">
+                      <p:stCondLst>
+                        <p:cond delay="indefinite"/>
+                      </p:stCondLst>
+                      <p:childTnLst>
+                        <p:par>
+                          <p:cTn id="16" fill="hold">
+                            <p:stCondLst>
+                              <p:cond delay="0"/>
+                            </p:stCondLst>
+                            <p:childTnLst>
+                              <p:par>
+                                <p:cTn id="17" presetID="1" presetClass="entr" presetSubtype="0" fill="hold" nodeType="clickEffect">
+                                  <p:stCondLst>
+                                    <p:cond delay="0"/>
+                                  </p:stCondLst>
+                                  <p:childTnLst>
+                                    <p:set>
+                                      <p:cBhvr>
+                                        <p:cTn id="18" dur="1" fill="hold">
+                                          <p:stCondLst>
+                                            <p:cond delay="0"/>
+                                          </p:stCondLst>
+                                        </p:cTn>
+                                        <p:tgtEl>
+                                          <p:spTgt spid="2">
+                                            <p:txEl>
+                                              <p:pRg st="3" end="3"/>
+                                            </p:txEl>
+                                          </p:spTgt>
+                                        </p:tgtEl>
+                                        <p:attrNameLst>
+                                          <p:attrName>style.visibility</p:attrName>
+                                        </p:attrNameLst>
+                                      </p:cBhvr>
+                                      <p:to>
+                                        <p:strVal val="visible"/>
+                                      </p:to>
+                                    </p:set>
+                                  </p:childTnLst>
+                                </p:cTn>
+                              </p:par>
+                            </p:childTnLst>
+                          </p:cTn>
+                        </p:par>
+                      </p:childTnLst>
+                    </p:cTn>
+                  </p:par>
+                  <p:par>
+                    <p:cTn id="19" fill="hold">
+                      <p:stCondLst>
+                        <p:cond delay="indefinite"/>
+                      </p:stCondLst>
+                      <p:childTnLst>
+                        <p:par>
+                          <p:cTn id="20" fill="hold">
+                            <p:stCondLst>
+                              <p:cond delay="0"/>
+                            </p:stCondLst>
+                            <p:childTnLst>
+                              <p:par>
+                                <p:cTn id="21" presetID="1" presetClass="entr" presetSubtype="0" fill="hold" nodeType="clickEffect">
+                                  <p:stCondLst>
+                                    <p:cond delay="0"/>
+                                  </p:stCondLst>
+                                  <p:childTnLst>
+                                    <p:set>
+                                      <p:cBhvr>
+                                        <p:cTn id="22" dur="1" fill="hold">
+                                          <p:stCondLst>
+                                            <p:cond delay="0"/>
+                                          </p:stCondLst>
+                                        </p:cTn>
+                                        <p:tgtEl>
+                                          <p:spTgt spid="2">
+                                            <p:txEl>
+                                              <p:pRg st="4" end="4"/>
+                                            </p:txEl>
+                                          </p:spTgt>
+                                        </p:tgtEl>
+                                        <p:attrNameLst>
+                                          <p:attrName>style.visibility</p:attrName>
+                                        </p:attrNameLst>
+                                      </p:cBhvr>
+                                      <p:to>
+                                        <p:strVal val="visible"/>
+                                      </p:to>
+                                    </p:set>
+                                  </p:childTnLst>
+                                </p:cTn>
+                              </p:par>
+                            </p:childTnLst>
+                          </p:cTn>
+                        </p:par>
+                      </p:childTnLst>
+                    </p:cTn>
+                  </p:par>
+                </p:childTnLst>
+              </p:cTn>
+              <p:prevCondLst>
+                <p:cond evt="onPrev" delay="0">
+                  <p:tgtEl>
+                    <p:sldTgt/>
+                  </p:tgtEl>
+                </p:cond>
+              </p:prevCondLst>
+              <p:nextCondLst>
+                <p:cond evt="onNext" delay="0">
+                  <p:tgtEl>
+                    <p:sldTgt/>
+                  </p:tgtEl>
+                </p:cond>
+              </p:nextCondLst>
+            </p:seq>
+          </p:childTnLst>
+        </p:cTn>
+      </p:par>
+    </p:tnLst>
+  </p:timing>
+</p:sld>
+</file>
+
+<file path=ppt/slides/slide15.xml><?xml version="1.0" encoding="utf-8"?>
+<p:sld xmlns:a="http://schemas.openxmlformats.org/drawingml/2006/main" xmlns:r="http://schemas.openxmlformats.org/officeDocument/2006/relationships" xmlns:p="http://schemas.openxmlformats.org/presentationml/2006/main">
+  <p:cSld>
+    <p:spTree>
+      <p:nvGrpSpPr>
+        <p:cNvPr id="1" name="Shape 126">
+          <a:extLst>
+            <a:ext uri="{FF2B5EF4-FFF2-40B4-BE49-F238E27FC236}">
               <a16:creationId xmlns:a16="http://schemas.microsoft.com/office/drawing/2014/main" id="{13252613-B2B9-8724-3318-2EC3EED68B81}"/>
             </a:ext>
           </a:extLst>
@@ -13378,10 +14302,21 @@
                 <a:cs typeface="Calibri" panose="020F0502020204030204" pitchFamily="34" charset="0"/>
                 <a:sym typeface="Arial"/>
               </a:rPr>
-              <a:t>שצריך אלגוריתם שלם כדי לממש (</a:t>
-            </a:r>
-            <a:r>
-              <a:rPr lang="he-IL" sz="6000">
+              <a:t>שצריך אלגוריתם שלם כדי לממש </a:t>
+            </a:r>
+            <a:r>
+              <a:rPr lang="he-IL" sz="3200">
+                <a:solidFill>
+                  <a:srgbClr val="081D3F"/>
+                </a:solidFill>
+                <a:latin typeface="Calibri" panose="020F0502020204030204" pitchFamily="34" charset="0"/>
+                <a:cs typeface="Calibri" panose="020F0502020204030204" pitchFamily="34" charset="0"/>
+                <a:sym typeface="Arial"/>
+              </a:rPr>
+              <a:t>(</a:t>
+            </a:r>
+            <a:r>
+              <a:rPr lang="he-IL" sz="3200">
                 <a:solidFill>
                   <a:srgbClr val="081D3F"/>
                 </a:solidFill>
@@ -13390,10 +14325,10 @@
                 <a:sym typeface="Arial"/>
                 <a:hlinkClick r:id="rId4" action="ppaction://hlinkfile"/>
               </a:rPr>
-              <a:t>דוגמה</a:t>
-            </a:r>
-            <a:r>
-              <a:rPr lang="he-IL" sz="6000">
+              <a:t>מאמר</a:t>
+            </a:r>
+            <a:r>
+              <a:rPr lang="he-IL" sz="3200">
                 <a:solidFill>
                   <a:srgbClr val="081D3F"/>
                 </a:solidFill>
@@ -13401,7 +14336,18 @@
                 <a:cs typeface="Calibri" panose="020F0502020204030204" pitchFamily="34" charset="0"/>
                 <a:sym typeface="Arial"/>
               </a:rPr>
-              <a:t>);</a:t>
+              <a:t>:  אלג.1)</a:t>
+            </a:r>
+            <a:r>
+              <a:rPr lang="he-IL" sz="6000">
+                <a:solidFill>
+                  <a:srgbClr val="081D3F"/>
+                </a:solidFill>
+                <a:latin typeface="Calibri" panose="020F0502020204030204" pitchFamily="34" charset="0"/>
+                <a:cs typeface="Calibri" panose="020F0502020204030204" pitchFamily="34" charset="0"/>
+                <a:sym typeface="Arial"/>
+              </a:rPr>
+              <a:t>;</a:t>
             </a:r>
           </a:p>
           <a:p>
@@ -13432,10 +14378,21 @@
                 <a:cs typeface="Calibri" panose="020F0502020204030204" pitchFamily="34" charset="0"/>
                 <a:sym typeface="Arial"/>
               </a:rPr>
-              <a:t>שבתוכן מסתתר אלגוריתם (</a:t>
-            </a:r>
-            <a:r>
-              <a:rPr lang="he-IL" sz="6000">
+              <a:t>שבתוכן מסתתר אלגוריתם </a:t>
+            </a:r>
+            <a:r>
+              <a:rPr lang="he-IL" sz="3200">
+                <a:solidFill>
+                  <a:srgbClr val="081D3F"/>
+                </a:solidFill>
+                <a:latin typeface="Calibri" panose="020F0502020204030204" pitchFamily="34" charset="0"/>
+                <a:cs typeface="Calibri" panose="020F0502020204030204" pitchFamily="34" charset="0"/>
+                <a:sym typeface="Arial"/>
+              </a:rPr>
+              <a:t>(</a:t>
+            </a:r>
+            <a:r>
+              <a:rPr lang="he-IL" sz="3200">
                 <a:solidFill>
                   <a:srgbClr val="081D3F"/>
                 </a:solidFill>
@@ -13444,10 +14401,10 @@
                 <a:sym typeface="Arial"/>
                 <a:hlinkClick r:id="rId5" action="ppaction://hlinkfile"/>
               </a:rPr>
-              <a:t>דוגמה</a:t>
-            </a:r>
-            <a:r>
-              <a:rPr lang="he-IL" sz="6000">
+              <a:t>מאמר</a:t>
+            </a:r>
+            <a:r>
+              <a:rPr lang="he-IL" sz="3200">
                 <a:solidFill>
                   <a:srgbClr val="081D3F"/>
                 </a:solidFill>
@@ -13455,7 +14412,40 @@
                 <a:cs typeface="Calibri" panose="020F0502020204030204" pitchFamily="34" charset="0"/>
                 <a:sym typeface="Arial"/>
               </a:rPr>
-              <a:t>);</a:t>
+              <a:t>:</a:t>
+            </a:r>
+            <a:r>
+              <a:rPr lang="en-US" sz="3200">
+                <a:solidFill>
+                  <a:srgbClr val="081D3F"/>
+                </a:solidFill>
+                <a:latin typeface="Calibri" panose="020F0502020204030204" pitchFamily="34" charset="0"/>
+                <a:cs typeface="Calibri" panose="020F0502020204030204" pitchFamily="34" charset="0"/>
+                <a:sym typeface="Arial"/>
+              </a:rPr>
+              <a:t> </a:t>
+            </a:r>
+            <a:r>
+              <a:rPr lang="he-IL" sz="3200">
+                <a:solidFill>
+                  <a:srgbClr val="081D3F"/>
+                </a:solidFill>
+                <a:latin typeface="Calibri" panose="020F0502020204030204" pitchFamily="34" charset="0"/>
+                <a:cs typeface="Calibri" panose="020F0502020204030204" pitchFamily="34" charset="0"/>
+                <a:sym typeface="Arial"/>
+              </a:rPr>
+              <a:t>למה 4.3)</a:t>
+            </a:r>
+            <a:r>
+              <a:rPr lang="he-IL" sz="6000">
+                <a:solidFill>
+                  <a:srgbClr val="081D3F"/>
+                </a:solidFill>
+                <a:latin typeface="Calibri" panose="020F0502020204030204" pitchFamily="34" charset="0"/>
+                <a:cs typeface="Calibri" panose="020F0502020204030204" pitchFamily="34" charset="0"/>
+                <a:sym typeface="Arial"/>
+              </a:rPr>
+              <a:t>;</a:t>
             </a:r>
           </a:p>
           <a:p>
@@ -13497,10 +14487,21 @@
                 <a:cs typeface="Calibri" panose="020F0502020204030204" pitchFamily="34" charset="0"/>
                 <a:sym typeface="Arial"/>
               </a:rPr>
-              <a:t>" (</a:t>
-            </a:r>
-            <a:r>
-              <a:rPr lang="he-IL" sz="6000">
+              <a:t>" </a:t>
+            </a:r>
+            <a:r>
+              <a:rPr lang="he-IL" sz="3200">
+                <a:solidFill>
+                  <a:srgbClr val="081D3F"/>
+                </a:solidFill>
+                <a:latin typeface="Calibri" panose="020F0502020204030204" pitchFamily="34" charset="0"/>
+                <a:cs typeface="Calibri" panose="020F0502020204030204" pitchFamily="34" charset="0"/>
+                <a:sym typeface="Arial"/>
+              </a:rPr>
+              <a:t>(</a:t>
+            </a:r>
+            <a:r>
+              <a:rPr lang="he-IL" sz="3200">
                 <a:solidFill>
                   <a:srgbClr val="081D3F"/>
                 </a:solidFill>
@@ -13509,10 +14510,10 @@
                 <a:sym typeface="Arial"/>
                 <a:hlinkClick r:id="rId6" action="ppaction://hlinkfile"/>
               </a:rPr>
-              <a:t>דוגמה</a:t>
-            </a:r>
-            <a:r>
-              <a:rPr lang="he-IL" sz="6000">
+              <a:t>מאמר</a:t>
+            </a:r>
+            <a:r>
+              <a:rPr lang="he-IL" sz="3200">
                 <a:solidFill>
                   <a:srgbClr val="081D3F"/>
                 </a:solidFill>
@@ -13520,7 +14521,18 @@
                 <a:cs typeface="Calibri" panose="020F0502020204030204" pitchFamily="34" charset="0"/>
                 <a:sym typeface="Arial"/>
               </a:rPr>
-              <a:t>);</a:t>
+              <a:t>: אלג.2)</a:t>
+            </a:r>
+            <a:r>
+              <a:rPr lang="he-IL" sz="6000">
+                <a:solidFill>
+                  <a:srgbClr val="081D3F"/>
+                </a:solidFill>
+                <a:latin typeface="Calibri" panose="020F0502020204030204" pitchFamily="34" charset="0"/>
+                <a:cs typeface="Calibri" panose="020F0502020204030204" pitchFamily="34" charset="0"/>
+                <a:sym typeface="Arial"/>
+              </a:rPr>
+              <a:t>;</a:t>
             </a:r>
           </a:p>
           <a:p>
@@ -13551,10 +14563,21 @@
                 <a:cs typeface="Calibri" panose="020F0502020204030204" pitchFamily="34" charset="0"/>
                 <a:sym typeface="Arial"/>
               </a:rPr>
-              <a:t> באלגוריתמים (</a:t>
-            </a:r>
-            <a:r>
-              <a:rPr lang="he-IL" sz="6000">
+              <a:t> באלגוריתמים </a:t>
+            </a:r>
+            <a:r>
+              <a:rPr lang="he-IL" sz="3200">
+                <a:solidFill>
+                  <a:srgbClr val="081D3F"/>
+                </a:solidFill>
+                <a:latin typeface="Calibri" panose="020F0502020204030204" pitchFamily="34" charset="0"/>
+                <a:cs typeface="Calibri" panose="020F0502020204030204" pitchFamily="34" charset="0"/>
+                <a:sym typeface="Arial"/>
+              </a:rPr>
+              <a:t>(</a:t>
+            </a:r>
+            <a:r>
+              <a:rPr lang="he-IL" sz="3200">
                 <a:solidFill>
                   <a:srgbClr val="081D3F"/>
                 </a:solidFill>
@@ -13563,10 +14586,10 @@
                 <a:sym typeface="Arial"/>
                 <a:hlinkClick r:id="rId7" action="ppaction://hlinkfile"/>
               </a:rPr>
-              <a:t>דוגמה</a:t>
-            </a:r>
-            <a:r>
-              <a:rPr lang="he-IL" sz="6000">
+              <a:t>מאמר</a:t>
+            </a:r>
+            <a:r>
+              <a:rPr lang="he-IL" sz="3200">
                 <a:solidFill>
                   <a:srgbClr val="081D3F"/>
                 </a:solidFill>
@@ -13574,7 +14597,40 @@
                 <a:cs typeface="Calibri" panose="020F0502020204030204" pitchFamily="34" charset="0"/>
                 <a:sym typeface="Arial"/>
               </a:rPr>
-              <a:t>);</a:t>
+              <a:t>:</a:t>
+            </a:r>
+            <a:r>
+              <a:rPr lang="en-US" sz="3200">
+                <a:solidFill>
+                  <a:srgbClr val="081D3F"/>
+                </a:solidFill>
+                <a:latin typeface="Calibri" panose="020F0502020204030204" pitchFamily="34" charset="0"/>
+                <a:cs typeface="Calibri" panose="020F0502020204030204" pitchFamily="34" charset="0"/>
+                <a:sym typeface="Arial"/>
+              </a:rPr>
+              <a:t> </a:t>
+            </a:r>
+            <a:r>
+              <a:rPr lang="he-IL" sz="3200">
+                <a:solidFill>
+                  <a:srgbClr val="081D3F"/>
+                </a:solidFill>
+                <a:latin typeface="Calibri" panose="020F0502020204030204" pitchFamily="34" charset="0"/>
+                <a:cs typeface="Calibri" panose="020F0502020204030204" pitchFamily="34" charset="0"/>
+                <a:sym typeface="Arial"/>
+              </a:rPr>
+              <a:t>אלג.1,2,8; דואל)</a:t>
+            </a:r>
+            <a:r>
+              <a:rPr lang="he-IL" sz="6000">
+                <a:solidFill>
+                  <a:srgbClr val="081D3F"/>
+                </a:solidFill>
+                <a:latin typeface="Calibri" panose="020F0502020204030204" pitchFamily="34" charset="0"/>
+                <a:cs typeface="Calibri" panose="020F0502020204030204" pitchFamily="34" charset="0"/>
+                <a:sym typeface="Arial"/>
+              </a:rPr>
+              <a:t>;</a:t>
             </a:r>
           </a:p>
           <a:p>
@@ -14167,7 +15223,7 @@
         <p:fade/>
       </p:transition>
     </mc:Choice>
-    <mc:Fallback xmlns:ahyp="http://schemas.microsoft.com/office/drawing/2018/hyperlinkcolor" xmlns:p15="http://schemas.microsoft.com/office/powerpoint/2012/main" xmlns:com="http://schemas.openxmlformats.org/drawingml/2006/compatibility" xmlns:pvml="urn:schemas-microsoft-com:office:powerpoint" xmlns:v="urn:schemas-microsoft-com:vml" xmlns:o="urn:schemas-microsoft-com:office:office" xmlns:dgm="http://schemas.openxmlformats.org/drawingml/2006/diagram" xmlns:c="http://schemas.openxmlformats.org/drawingml/2006/chart" xmlns:mv="urn:schemas-microsoft-com:mac:vml" xmlns="">
+    <mc:Fallback xmlns="" xmlns:mv="urn:schemas-microsoft-com:mac:vml" xmlns:c="http://schemas.openxmlformats.org/drawingml/2006/chart" xmlns:dgm="http://schemas.openxmlformats.org/drawingml/2006/diagram" xmlns:o="urn:schemas-microsoft-com:office:office" xmlns:v="urn:schemas-microsoft-com:vml" xmlns:pvml="urn:schemas-microsoft-com:office:powerpoint" xmlns:com="http://schemas.openxmlformats.org/drawingml/2006/compatibility" xmlns:p15="http://schemas.microsoft.com/office/powerpoint/2012/main" xmlns:ahyp="http://schemas.microsoft.com/office/drawing/2018/hyperlinkcolor">
       <p:transition spd="slow">
         <p:fade/>
       </p:transition>
@@ -15438,7 +16494,7 @@
                 <a:cs typeface="Calibri" panose="020F0502020204030204" pitchFamily="34" charset="0"/>
                 <a:sym typeface="Arial"/>
               </a:rPr>
-              <a:t>בשנת 2024 </a:t>
+              <a:t>בשנת 2025 </a:t>
             </a:r>
             <a:r>
               <a:rPr lang="he-IL" sz="6000">
@@ -15450,7 +16506,7 @@
                 <a:sym typeface="Arial"/>
                 <a:hlinkClick r:id="rId4"/>
               </a:rPr>
-              <a:t>התפרסמו מעל 24,000 אלגוריתמים חדשים</a:t>
+              <a:t>התפרסמו מעל 22,000 אלגוריתמים חדשים</a:t>
             </a:r>
             <a:r>
               <a:rPr lang="he-IL" sz="6000">
@@ -15644,7 +16700,7 @@
         <p:fade/>
       </p:transition>
     </mc:Choice>
-    <mc:Fallback xmlns:ahyp="http://schemas.microsoft.com/office/drawing/2018/hyperlinkcolor" xmlns:p15="http://schemas.microsoft.com/office/powerpoint/2012/main" xmlns:com="http://schemas.openxmlformats.org/drawingml/2006/compatibility" xmlns:pvml="urn:schemas-microsoft-com:office:powerpoint" xmlns:v="urn:schemas-microsoft-com:vml" xmlns:o="urn:schemas-microsoft-com:office:office" xmlns:dgm="http://schemas.openxmlformats.org/drawingml/2006/diagram" xmlns:c="http://schemas.openxmlformats.org/drawingml/2006/chart" xmlns:mv="urn:schemas-microsoft-com:mac:vml" xmlns="">
+    <mc:Fallback xmlns="" xmlns:mv="urn:schemas-microsoft-com:mac:vml" xmlns:c="http://schemas.openxmlformats.org/drawingml/2006/chart" xmlns:dgm="http://schemas.openxmlformats.org/drawingml/2006/diagram" xmlns:o="urn:schemas-microsoft-com:office:office" xmlns:v="urn:schemas-microsoft-com:vml" xmlns:pvml="urn:schemas-microsoft-com:office:powerpoint" xmlns:com="http://schemas.openxmlformats.org/drawingml/2006/compatibility" xmlns:p15="http://schemas.microsoft.com/office/powerpoint/2012/main" xmlns:ahyp="http://schemas.microsoft.com/office/drawing/2018/hyperlinkcolor">
       <p:transition spd="slow">
         <p:fade/>
       </p:transition>
@@ -16094,7 +17150,7 @@
         <p:fade/>
       </p:transition>
     </mc:Choice>
-    <mc:Fallback xmlns:ahyp="http://schemas.microsoft.com/office/drawing/2018/hyperlinkcolor" xmlns:p15="http://schemas.microsoft.com/office/powerpoint/2012/main" xmlns:com="http://schemas.openxmlformats.org/drawingml/2006/compatibility" xmlns:pvml="urn:schemas-microsoft-com:office:powerpoint" xmlns:v="urn:schemas-microsoft-com:vml" xmlns:o="urn:schemas-microsoft-com:office:office" xmlns:dgm="http://schemas.openxmlformats.org/drawingml/2006/diagram" xmlns:c="http://schemas.openxmlformats.org/drawingml/2006/chart" xmlns:mv="urn:schemas-microsoft-com:mac:vml" xmlns="">
+    <mc:Fallback xmlns="" xmlns:mv="urn:schemas-microsoft-com:mac:vml" xmlns:c="http://schemas.openxmlformats.org/drawingml/2006/chart" xmlns:dgm="http://schemas.openxmlformats.org/drawingml/2006/diagram" xmlns:o="urn:schemas-microsoft-com:office:office" xmlns:v="urn:schemas-microsoft-com:vml" xmlns:pvml="urn:schemas-microsoft-com:office:powerpoint" xmlns:com="http://schemas.openxmlformats.org/drawingml/2006/compatibility" xmlns:p15="http://schemas.microsoft.com/office/powerpoint/2012/main" xmlns:ahyp="http://schemas.microsoft.com/office/drawing/2018/hyperlinkcolor">
       <p:transition spd="slow">
         <p:fade/>
       </p:transition>
@@ -17943,10 +18999,33 @@
                 <a:cs typeface="Calibri" panose="020F0502020204030204" pitchFamily="34" charset="0"/>
                 <a:sym typeface="Arial"/>
               </a:rPr>
-              <a:t>Front End / Back End / Full Stack / Web Development /  Game </a:t>
-            </a:r>
-            <a:r>
-              <a:rPr lang="he-IL" sz="6000">
+              <a:t>Front End / Back End / Full Stack / </a:t>
+            </a:r>
+            <a:endParaRPr lang="he-IL" sz="6000">
+              <a:solidFill>
+                <a:srgbClr val="081D3F"/>
+              </a:solidFill>
+              <a:latin typeface="Calibri" panose="020F0502020204030204" pitchFamily="34" charset="0"/>
+              <a:cs typeface="Calibri" panose="020F0502020204030204" pitchFamily="34" charset="0"/>
+              <a:sym typeface="Arial"/>
+            </a:endParaRPr>
+          </a:p>
+          <a:p>
+            <a:pPr marL="857250" marR="0" lvl="0" indent="-857250" algn="l">
+              <a:lnSpc>
+                <a:spcPct val="140000"/>
+              </a:lnSpc>
+              <a:spcBef>
+                <a:spcPts val="0"/>
+              </a:spcBef>
+              <a:spcAft>
+                <a:spcPts val="0"/>
+              </a:spcAft>
+              <a:buFont typeface="Arial" panose="020B0604020202020204" pitchFamily="34" charset="0"/>
+              <a:buChar char="•"/>
+            </a:pPr>
+            <a:r>
+              <a:rPr lang="en-US" sz="6000">
                 <a:solidFill>
                   <a:srgbClr val="081D3F"/>
                 </a:solidFill>
@@ -17954,18 +19033,7 @@
                 <a:cs typeface="Calibri" panose="020F0502020204030204" pitchFamily="34" charset="0"/>
                 <a:sym typeface="Arial"/>
               </a:rPr>
-              <a:t>.</a:t>
-            </a:r>
-            <a:r>
-              <a:rPr lang="en-US" sz="6000">
-                <a:solidFill>
-                  <a:srgbClr val="081D3F"/>
-                </a:solidFill>
-                <a:latin typeface="Calibri" panose="020F0502020204030204" pitchFamily="34" charset="0"/>
-                <a:cs typeface="Calibri" panose="020F0502020204030204" pitchFamily="34" charset="0"/>
-                <a:sym typeface="Arial"/>
-              </a:rPr>
-              <a:t>Development..</a:t>
+              <a:t>Web Development /  Game Development…</a:t>
             </a:r>
           </a:p>
           <a:p>
@@ -18242,6 +19310,55 @@
                                           <p:spTgt spid="4">
                                             <p:txEl>
                                               <p:pRg st="3" end="3"/>
+                                            </p:txEl>
+                                          </p:spTgt>
+                                        </p:tgtEl>
+                                        <p:attrNameLst>
+                                          <p:attrName>style.visibility</p:attrName>
+                                        </p:attrNameLst>
+                                      </p:cBhvr>
+                                      <p:to>
+                                        <p:strVal val="visible"/>
+                                      </p:to>
+                                    </p:set>
+                                  </p:childTnLst>
+                                </p:cTn>
+                              </p:par>
+                            </p:childTnLst>
+                          </p:cTn>
+                        </p:par>
+                      </p:childTnLst>
+                    </p:cTn>
+                  </p:par>
+                  <p:par>
+                    <p:cTn id="19" fill="hold">
+                      <p:stCondLst>
+                        <p:cond delay="indefinite"/>
+                      </p:stCondLst>
+                      <p:childTnLst>
+                        <p:par>
+                          <p:cTn id="20" fill="hold">
+                            <p:stCondLst>
+                              <p:cond delay="0"/>
+                            </p:stCondLst>
+                            <p:childTnLst>
+                              <p:par>
+                                <p:cTn id="21" presetID="1" presetClass="entr" presetSubtype="0" fill="hold" nodeType="clickEffect">
+                                  <p:stCondLst>
+                                    <p:cond delay="0"/>
+                                  </p:stCondLst>
+                                  <p:childTnLst>
+                                    <p:set>
+                                      <p:cBhvr>
+                                        <p:cTn id="22" dur="1" fill="hold">
+                                          <p:stCondLst>
+                                            <p:cond delay="0"/>
+                                          </p:stCondLst>
+                                        </p:cTn>
+                                        <p:tgtEl>
+                                          <p:spTgt spid="4">
+                                            <p:txEl>
+                                              <p:pRg st="4" end="4"/>
                                             </p:txEl>
                                           </p:spTgt>
                                         </p:tgtEl>
